--- a/BDS_Project2_prezentacija.pptx
+++ b/BDS_Project2_prezentacija.pptx
@@ -5,10 +5,10 @@
     <p:sldMasterId id="2147483660" r:id="rId4"/>
   </p:sldMasterIdLst>
   <p:notesMasterIdLst>
-    <p:notesMasterId r:id="rId15"/>
+    <p:notesMasterId r:id="rId17"/>
   </p:notesMasterIdLst>
   <p:handoutMasterIdLst>
-    <p:handoutMasterId r:id="rId16"/>
+    <p:handoutMasterId r:id="rId18"/>
   </p:handoutMasterIdLst>
   <p:sldIdLst>
     <p:sldId id="257" r:id="rId5"/>
@@ -21,6 +21,8 @@
     <p:sldId id="280" r:id="rId12"/>
     <p:sldId id="274" r:id="rId13"/>
     <p:sldId id="275" r:id="rId14"/>
+    <p:sldId id="282" r:id="rId15"/>
+    <p:sldId id="283" r:id="rId16"/>
   </p:sldIdLst>
   <p:sldSz cx="12188825" cy="6858000"/>
   <p:notesSz cx="6858000" cy="9144000"/>
@@ -234,7 +236,7 @@
           <a:p>
             <a:fld id="{FE5B4EDC-59C0-49C7-8ADA-5A781B329E02}" type="datetimeFigureOut">
               <a:rPr lang="en-US"/>
-              <a:t>10/29/2025</a:t>
+              <a:t>11/18/2025</a:t>
             </a:fld>
             <a:endParaRPr/>
           </a:p>
@@ -399,7 +401,7 @@
           <a:p>
             <a:fld id="{F2D8D46A-B586-417D-BFBD-8C8FE0AAF762}" type="datetimeFigureOut">
               <a:rPr lang="en-US"/>
-              <a:t>10/29/2025</a:t>
+              <a:t>11/18/2025</a:t>
             </a:fld>
             <a:endParaRPr/>
           </a:p>
@@ -1417,7 +1419,7 @@
           <a:p>
             <a:fld id="{F0DFD029-FB74-4578-B929-F66AA97659CA}" type="datetimeFigureOut">
               <a:rPr lang="en-US"/>
-              <a:t>10/29/2025</a:t>
+              <a:t>11/18/2025</a:t>
             </a:fld>
             <a:endParaRPr/>
           </a:p>
@@ -1606,7 +1608,7 @@
           <a:p>
             <a:fld id="{F0DFD029-FB74-4578-B929-F66AA97659CA}" type="datetimeFigureOut">
               <a:rPr lang="en-US"/>
-              <a:t>10/29/2025</a:t>
+              <a:t>11/18/2025</a:t>
             </a:fld>
             <a:endParaRPr/>
           </a:p>
@@ -1805,7 +1807,7 @@
           <a:p>
             <a:fld id="{F0DFD029-FB74-4578-B929-F66AA97659CA}" type="datetimeFigureOut">
               <a:rPr lang="en-US"/>
-              <a:t>10/29/2025</a:t>
+              <a:t>11/18/2025</a:t>
             </a:fld>
             <a:endParaRPr/>
           </a:p>
@@ -1994,7 +1996,7 @@
           <a:p>
             <a:fld id="{F0DFD029-FB74-4578-B929-F66AA97659CA}" type="datetimeFigureOut">
               <a:rPr lang="en-US"/>
-              <a:t>10/29/2025</a:t>
+              <a:t>11/18/2025</a:t>
             </a:fld>
             <a:endParaRPr/>
           </a:p>
@@ -2417,7 +2419,7 @@
           <a:p>
             <a:fld id="{F0DFD029-FB74-4578-B929-F66AA97659CA}" type="datetimeFigureOut">
               <a:rPr lang="en-US"/>
-              <a:t>10/29/2025</a:t>
+              <a:t>11/18/2025</a:t>
             </a:fld>
             <a:endParaRPr/>
           </a:p>
@@ -2712,7 +2714,7 @@
           <a:p>
             <a:fld id="{F0DFD029-FB74-4578-B929-F66AA97659CA}" type="datetimeFigureOut">
               <a:rPr lang="en-US"/>
-              <a:t>10/29/2025</a:t>
+              <a:t>11/18/2025</a:t>
             </a:fld>
             <a:endParaRPr/>
           </a:p>
@@ -3159,7 +3161,7 @@
           <a:p>
             <a:fld id="{F0DFD029-FB74-4578-B929-F66AA97659CA}" type="datetimeFigureOut">
               <a:rPr lang="en-US"/>
-              <a:t>10/29/2025</a:t>
+              <a:t>11/18/2025</a:t>
             </a:fld>
             <a:endParaRPr/>
           </a:p>
@@ -3280,7 +3282,7 @@
           <a:p>
             <a:fld id="{F0DFD029-FB74-4578-B929-F66AA97659CA}" type="datetimeFigureOut">
               <a:rPr lang="en-US"/>
-              <a:t>10/29/2025</a:t>
+              <a:t>11/18/2025</a:t>
             </a:fld>
             <a:endParaRPr/>
           </a:p>
@@ -3378,7 +3380,7 @@
           <a:p>
             <a:fld id="{F0DFD029-FB74-4578-B929-F66AA97659CA}" type="datetimeFigureOut">
               <a:rPr lang="en-US"/>
-              <a:t>10/29/2025</a:t>
+              <a:t>11/18/2025</a:t>
             </a:fld>
             <a:endParaRPr/>
           </a:p>
@@ -3668,7 +3670,7 @@
           <a:p>
             <a:fld id="{F0DFD029-FB74-4578-B929-F66AA97659CA}" type="datetimeFigureOut">
               <a:rPr lang="en-US"/>
-              <a:t>10/29/2025</a:t>
+              <a:t>11/18/2025</a:t>
             </a:fld>
             <a:endParaRPr/>
           </a:p>
@@ -3947,7 +3949,7 @@
           <a:p>
             <a:fld id="{F0DFD029-FB74-4578-B929-F66AA97659CA}" type="datetimeFigureOut">
               <a:rPr lang="en-US"/>
-              <a:t>10/29/2025</a:t>
+              <a:t>11/18/2025</a:t>
             </a:fld>
             <a:endParaRPr/>
           </a:p>
@@ -4538,7 +4540,7 @@
             <a:fld id="{F0DFD029-FB74-4578-B929-F66AA97659CA}" type="datetimeFigureOut">
               <a:rPr lang="en-US"/>
               <a:pPr/>
-              <a:t>10/29/2025</a:t>
+              <a:t>11/18/2025</a:t>
             </a:fld>
             <a:endParaRPr/>
           </a:p>
@@ -5358,6 +5360,335 @@
 </p:sld>
 </file>
 
+<file path=ppt/slides/slide11.xml><?xml version="1.0" encoding="utf-8"?>
+<p:sld xmlns:a="http://schemas.openxmlformats.org/drawingml/2006/main" xmlns:r="http://schemas.openxmlformats.org/officeDocument/2006/relationships" xmlns:p="http://schemas.openxmlformats.org/presentationml/2006/main">
+  <p:cSld>
+    <p:spTree>
+      <p:nvGrpSpPr>
+        <p:cNvPr id="1" name=""/>
+        <p:cNvGrpSpPr/>
+        <p:nvPr/>
+      </p:nvGrpSpPr>
+      <p:grpSpPr>
+        <a:xfrm>
+          <a:off x="0" y="0"/>
+          <a:ext cx="0" cy="0"/>
+          <a:chOff x="0" y="0"/>
+          <a:chExt cx="0" cy="0"/>
+        </a:xfrm>
+      </p:grpSpPr>
+      <p:sp>
+        <p:nvSpPr>
+          <p:cNvPr id="2" name="Title 1">
+            <a:extLst>
+              <a:ext uri="{FF2B5EF4-FFF2-40B4-BE49-F238E27FC236}">
+                <a16:creationId xmlns:a16="http://schemas.microsoft.com/office/drawing/2014/main" id="{7C190776-56FB-4CBC-8E79-F6967019E463}"/>
+              </a:ext>
+            </a:extLst>
+          </p:cNvPr>
+          <p:cNvSpPr>
+            <a:spLocks noGrp="1"/>
+          </p:cNvSpPr>
+          <p:nvPr>
+            <p:ph type="title"/>
+          </p:nvPr>
+        </p:nvSpPr>
+        <p:spPr>
+          <a:xfrm>
+            <a:off x="1217612" y="260311"/>
+            <a:ext cx="10360501" cy="660400"/>
+          </a:xfrm>
+        </p:spPr>
+        <p:txBody>
+          <a:bodyPr>
+            <a:normAutofit/>
+          </a:bodyPr>
+          <a:lstStyle/>
+          <a:p>
+            <a:r>
+              <a:rPr lang="en-US" dirty="0">
+                <a:solidFill>
+                  <a:schemeClr val="bg2">
+                    <a:lumMod val="75000"/>
+                  </a:schemeClr>
+                </a:solidFill>
+              </a:rPr>
+              <a:t>Apache </a:t>
+            </a:r>
+            <a:r>
+              <a:rPr lang="en-US" dirty="0" err="1">
+                <a:solidFill>
+                  <a:schemeClr val="bg2">
+                    <a:lumMod val="75000"/>
+                  </a:schemeClr>
+                </a:solidFill>
+              </a:rPr>
+              <a:t>Flink</a:t>
+            </a:r>
+            <a:endParaRPr lang="en-US" dirty="0">
+              <a:solidFill>
+                <a:schemeClr val="bg2">
+                  <a:lumMod val="75000"/>
+                </a:schemeClr>
+              </a:solidFill>
+            </a:endParaRPr>
+          </a:p>
+        </p:txBody>
+      </p:sp>
+      <p:sp>
+        <p:nvSpPr>
+          <p:cNvPr id="3" name="Content Placeholder 2">
+            <a:extLst>
+              <a:ext uri="{FF2B5EF4-FFF2-40B4-BE49-F238E27FC236}">
+                <a16:creationId xmlns:a16="http://schemas.microsoft.com/office/drawing/2014/main" id="{CF077763-9822-4CC6-8ECE-F3F0BBA4DC5A}"/>
+              </a:ext>
+            </a:extLst>
+          </p:cNvPr>
+          <p:cNvSpPr>
+            <a:spLocks noGrp="1"/>
+          </p:cNvSpPr>
+          <p:nvPr>
+            <p:ph idx="1"/>
+          </p:nvPr>
+        </p:nvSpPr>
+        <p:spPr>
+          <a:xfrm>
+            <a:off x="912812" y="958070"/>
+            <a:ext cx="11201400" cy="957069"/>
+          </a:xfrm>
+        </p:spPr>
+        <p:txBody>
+          <a:bodyPr/>
+          <a:lstStyle/>
+          <a:p>
+            <a:r>
+              <a:rPr lang="sr-Latn-RS" sz="2000" dirty="0">
+                <a:solidFill>
+                  <a:schemeClr val="bg2">
+                    <a:lumMod val="75000"/>
+                  </a:schemeClr>
+                </a:solidFill>
+              </a:rPr>
+              <a:t>Sa </a:t>
+            </a:r>
+            <a:r>
+              <a:rPr lang="sr-Latn-RS" sz="2000" i="1" dirty="0">
+                <a:solidFill>
+                  <a:schemeClr val="bg2">
+                    <a:lumMod val="75000"/>
+                  </a:schemeClr>
+                </a:solidFill>
+              </a:rPr>
+              <a:t>fcd_topic</a:t>
+            </a:r>
+            <a:r>
+              <a:rPr lang="sr-Latn-RS" sz="2000" dirty="0">
+                <a:solidFill>
+                  <a:schemeClr val="bg2">
+                    <a:lumMod val="75000"/>
+                  </a:schemeClr>
+                </a:solidFill>
+              </a:rPr>
+              <a:t>-a se učitavaju podaci, vrši se njihovo grupisanje i agregacija po vremenskim prozorima i račuana se broj jedinstvenih vozila po ulici, kao i prosečna brzina u svakom intervalu od 10 minuta </a:t>
+            </a:r>
+            <a:endParaRPr lang="en-US" sz="2000" dirty="0">
+              <a:solidFill>
+                <a:schemeClr val="bg2">
+                  <a:lumMod val="75000"/>
+                </a:schemeClr>
+              </a:solidFill>
+            </a:endParaRPr>
+          </a:p>
+          <a:p>
+            <a:endParaRPr lang="en-US" dirty="0"/>
+          </a:p>
+        </p:txBody>
+      </p:sp>
+      <p:pic>
+        <p:nvPicPr>
+          <p:cNvPr id="5" name="Picture 4">
+            <a:extLst>
+              <a:ext uri="{FF2B5EF4-FFF2-40B4-BE49-F238E27FC236}">
+                <a16:creationId xmlns:a16="http://schemas.microsoft.com/office/drawing/2014/main" id="{366D27F4-64C2-4D6F-9B98-F57A34F48586}"/>
+              </a:ext>
+            </a:extLst>
+          </p:cNvPr>
+          <p:cNvPicPr>
+            <a:picLocks noChangeAspect="1"/>
+          </p:cNvPicPr>
+          <p:nvPr/>
+        </p:nvPicPr>
+        <p:blipFill>
+          <a:blip r:embed="rId2"/>
+          <a:stretch>
+            <a:fillRect/>
+          </a:stretch>
+        </p:blipFill>
+        <p:spPr>
+          <a:xfrm>
+            <a:off x="84210" y="1779955"/>
+            <a:ext cx="5029199" cy="4817734"/>
+          </a:xfrm>
+          <a:prstGeom prst="rect">
+            <a:avLst/>
+          </a:prstGeom>
+        </p:spPr>
+      </p:pic>
+      <p:pic>
+        <p:nvPicPr>
+          <p:cNvPr id="7" name="Picture 6">
+            <a:extLst>
+              <a:ext uri="{FF2B5EF4-FFF2-40B4-BE49-F238E27FC236}">
+                <a16:creationId xmlns:a16="http://schemas.microsoft.com/office/drawing/2014/main" id="{78785402-3CAD-40F8-AEB9-ACDBC12F3AC6}"/>
+              </a:ext>
+            </a:extLst>
+          </p:cNvPr>
+          <p:cNvPicPr>
+            <a:picLocks noChangeAspect="1"/>
+          </p:cNvPicPr>
+          <p:nvPr/>
+        </p:nvPicPr>
+        <p:blipFill>
+          <a:blip r:embed="rId3"/>
+          <a:stretch>
+            <a:fillRect/>
+          </a:stretch>
+        </p:blipFill>
+        <p:spPr>
+          <a:xfrm>
+            <a:off x="5865812" y="1779256"/>
+            <a:ext cx="5880893" cy="5055066"/>
+          </a:xfrm>
+          <a:prstGeom prst="rect">
+            <a:avLst/>
+          </a:prstGeom>
+        </p:spPr>
+      </p:pic>
+    </p:spTree>
+    <p:extLst>
+      <p:ext uri="{BB962C8B-B14F-4D97-AF65-F5344CB8AC3E}">
+        <p14:creationId xmlns:p14="http://schemas.microsoft.com/office/powerpoint/2010/main" val="1313084140"/>
+      </p:ext>
+    </p:extLst>
+  </p:cSld>
+  <p:clrMapOvr>
+    <a:masterClrMapping/>
+  </p:clrMapOvr>
+  <p:transition spd="slow">
+    <p:push dir="u"/>
+  </p:transition>
+</p:sld>
+</file>
+
+<file path=ppt/slides/slide12.xml><?xml version="1.0" encoding="utf-8"?>
+<p:sld xmlns:a="http://schemas.openxmlformats.org/drawingml/2006/main" xmlns:r="http://schemas.openxmlformats.org/officeDocument/2006/relationships" xmlns:p="http://schemas.openxmlformats.org/presentationml/2006/main">
+  <p:cSld>
+    <p:spTree>
+      <p:nvGrpSpPr>
+        <p:cNvPr id="1" name=""/>
+        <p:cNvGrpSpPr/>
+        <p:nvPr/>
+      </p:nvGrpSpPr>
+      <p:grpSpPr>
+        <a:xfrm>
+          <a:off x="0" y="0"/>
+          <a:ext cx="0" cy="0"/>
+          <a:chOff x="0" y="0"/>
+          <a:chExt cx="0" cy="0"/>
+        </a:xfrm>
+      </p:grpSpPr>
+      <p:sp>
+        <p:nvSpPr>
+          <p:cNvPr id="3" name="Content Placeholder 2">
+            <a:extLst>
+              <a:ext uri="{FF2B5EF4-FFF2-40B4-BE49-F238E27FC236}">
+                <a16:creationId xmlns:a16="http://schemas.microsoft.com/office/drawing/2014/main" id="{3B3F2A88-ECE1-4A4E-B58B-0E9BEB364279}"/>
+              </a:ext>
+            </a:extLst>
+          </p:cNvPr>
+          <p:cNvSpPr>
+            <a:spLocks noGrp="1"/>
+          </p:cNvSpPr>
+          <p:nvPr>
+            <p:ph idx="1"/>
+          </p:nvPr>
+        </p:nvSpPr>
+        <p:spPr>
+          <a:xfrm>
+            <a:off x="989012" y="457200"/>
+            <a:ext cx="10360501" cy="584203"/>
+          </a:xfrm>
+        </p:spPr>
+        <p:txBody>
+          <a:bodyPr/>
+          <a:lstStyle/>
+          <a:p>
+            <a:r>
+              <a:rPr lang="sr-Latn-RS" dirty="0">
+                <a:solidFill>
+                  <a:schemeClr val="bg2">
+                    <a:lumMod val="75000"/>
+                  </a:schemeClr>
+                </a:solidFill>
+              </a:rPr>
+              <a:t>Rezultat izvršenja flink_streaming.py aplikacije</a:t>
+            </a:r>
+            <a:endParaRPr lang="en-US" dirty="0">
+              <a:solidFill>
+                <a:schemeClr val="bg2">
+                  <a:lumMod val="75000"/>
+                </a:schemeClr>
+              </a:solidFill>
+            </a:endParaRPr>
+          </a:p>
+        </p:txBody>
+      </p:sp>
+      <p:pic>
+        <p:nvPicPr>
+          <p:cNvPr id="4" name="Picture 3">
+            <a:extLst>
+              <a:ext uri="{FF2B5EF4-FFF2-40B4-BE49-F238E27FC236}">
+                <a16:creationId xmlns:a16="http://schemas.microsoft.com/office/drawing/2014/main" id="{67457C7E-6401-4CD7-94EC-AC0ADA0F5BB8}"/>
+              </a:ext>
+            </a:extLst>
+          </p:cNvPr>
+          <p:cNvPicPr>
+            <a:picLocks noChangeAspect="1"/>
+          </p:cNvPicPr>
+          <p:nvPr/>
+        </p:nvPicPr>
+        <p:blipFill>
+          <a:blip r:embed="rId2"/>
+          <a:stretch>
+            <a:fillRect/>
+          </a:stretch>
+        </p:blipFill>
+        <p:spPr>
+          <a:xfrm>
+            <a:off x="4111683" y="1524000"/>
+            <a:ext cx="4115157" cy="4493141"/>
+          </a:xfrm>
+          <a:prstGeom prst="rect">
+            <a:avLst/>
+          </a:prstGeom>
+        </p:spPr>
+      </p:pic>
+    </p:spTree>
+    <p:extLst>
+      <p:ext uri="{BB962C8B-B14F-4D97-AF65-F5344CB8AC3E}">
+        <p14:creationId xmlns:p14="http://schemas.microsoft.com/office/powerpoint/2010/main" val="4237572663"/>
+      </p:ext>
+    </p:extLst>
+  </p:cSld>
+  <p:clrMapOvr>
+    <a:masterClrMapping/>
+  </p:clrMapOvr>
+  <p:transition spd="slow">
+    <p:push dir="u"/>
+  </p:transition>
+</p:sld>
+</file>
+
 <file path=ppt/slides/slide2.xml><?xml version="1.0" encoding="utf-8"?>
 <p:sld xmlns:a="http://schemas.openxmlformats.org/drawingml/2006/main" xmlns:r="http://schemas.openxmlformats.org/officeDocument/2006/relationships" xmlns:p="http://schemas.openxmlformats.org/presentationml/2006/main">
   <p:cSld>
@@ -5486,6 +5817,25 @@
               <a:t>Cassandra</a:t>
             </a:r>
           </a:p>
+          <a:p>
+            <a:r>
+              <a:rPr lang="en-US" dirty="0" err="1">
+                <a:solidFill>
+                  <a:schemeClr val="bg2">
+                    <a:lumMod val="75000"/>
+                  </a:schemeClr>
+                </a:solidFill>
+              </a:rPr>
+              <a:t>Flink</a:t>
+            </a:r>
+            <a:endParaRPr lang="en-US" dirty="0">
+              <a:solidFill>
+                <a:schemeClr val="bg2">
+                  <a:lumMod val="75000"/>
+                </a:schemeClr>
+              </a:solidFill>
+            </a:endParaRPr>
+          </a:p>
         </p:txBody>
       </p:sp>
       <p:pic>
@@ -5510,8 +5860,8 @@
         </p:blipFill>
         <p:spPr>
           <a:xfrm>
-            <a:off x="3726381" y="4343482"/>
-            <a:ext cx="2409268" cy="2023784"/>
+            <a:off x="4259702" y="4616667"/>
+            <a:ext cx="2139431" cy="1797121"/>
           </a:xfrm>
           <a:prstGeom prst="rect">
             <a:avLst/>
@@ -5539,8 +5889,8 @@
         </p:blipFill>
         <p:spPr>
           <a:xfrm>
-            <a:off x="7846298" y="1038221"/>
-            <a:ext cx="3887628" cy="1884833"/>
+            <a:off x="7846298" y="1223287"/>
+            <a:ext cx="3505914" cy="1699767"/>
           </a:xfrm>
           <a:prstGeom prst="rect">
             <a:avLst/>
@@ -5569,8 +5919,8 @@
         </p:blipFill>
         <p:spPr>
           <a:xfrm>
-            <a:off x="5991341" y="2864618"/>
-            <a:ext cx="2615411" cy="1310754"/>
+            <a:off x="6703298" y="3197817"/>
+            <a:ext cx="2286000" cy="1145665"/>
           </a:xfrm>
           <a:prstGeom prst="rect">
             <a:avLst/>
@@ -5599,8 +5949,37 @@
         </p:blipFill>
         <p:spPr>
           <a:xfrm>
-            <a:off x="8150542" y="4326310"/>
-            <a:ext cx="2819400" cy="1893697"/>
+            <a:off x="8228012" y="4747513"/>
+            <a:ext cx="2286000" cy="1535430"/>
+          </a:xfrm>
+          <a:prstGeom prst="rect">
+            <a:avLst/>
+          </a:prstGeom>
+        </p:spPr>
+      </p:pic>
+      <p:pic>
+        <p:nvPicPr>
+          <p:cNvPr id="2" name="Picture 1">
+            <a:extLst>
+              <a:ext uri="{FF2B5EF4-FFF2-40B4-BE49-F238E27FC236}">
+                <a16:creationId xmlns:a16="http://schemas.microsoft.com/office/drawing/2014/main" id="{42D4D69F-27E3-4097-8E14-CBE98D5975B3}"/>
+              </a:ext>
+            </a:extLst>
+          </p:cNvPr>
+          <p:cNvPicPr>
+            <a:picLocks noChangeAspect="1"/>
+          </p:cNvPicPr>
+          <p:nvPr/>
+        </p:nvPicPr>
+        <p:blipFill rotWithShape="1">
+          <a:blip r:embed="rId6"/>
+          <a:srcRect l="16345" t="18525" r="22352" b="19299"/>
+          <a:stretch/>
+        </p:blipFill>
+        <p:spPr>
+          <a:xfrm>
+            <a:off x="4245530" y="2016232"/>
+            <a:ext cx="1883691" cy="1412768"/>
           </a:xfrm>
           <a:prstGeom prst="rect">
             <a:avLst/>
@@ -5935,10 +6314,10 @@
       </p:sp>
       <p:pic>
         <p:nvPicPr>
-          <p:cNvPr id="5" name="Picture 4">
+          <p:cNvPr id="4" name="Picture 3">
             <a:extLst>
               <a:ext uri="{FF2B5EF4-FFF2-40B4-BE49-F238E27FC236}">
-                <a16:creationId xmlns:a16="http://schemas.microsoft.com/office/drawing/2014/main" id="{B2893A87-93CF-41A5-BCEA-BD01939DC747}"/>
+                <a16:creationId xmlns:a16="http://schemas.microsoft.com/office/drawing/2014/main" id="{5BE73AE2-1E48-46FE-9B7A-D13F779671AE}"/>
               </a:ext>
             </a:extLst>
           </p:cNvPr>
@@ -5955,8 +6334,8 @@
         </p:blipFill>
         <p:spPr>
           <a:xfrm>
-            <a:off x="1145062" y="1828800"/>
-            <a:ext cx="10255289" cy="4043629"/>
+            <a:off x="169593" y="1828800"/>
+            <a:ext cx="11849638" cy="4086359"/>
           </a:xfrm>
           <a:prstGeom prst="rect">
             <a:avLst/>
@@ -7888,15 +8267,6 @@
 </file>
 
 <file path=customXml/item2.xml><?xml version="1.0" encoding="utf-8"?>
-<?mso-contentType ?>
-<FormTemplates xmlns="http://schemas.microsoft.com/sharepoint/v3/contenttype/forms">
-  <Display>DocumentLibraryForm</Display>
-  <Edit>AssetEditForm</Edit>
-  <New>DocumentLibraryForm</New>
-</FormTemplates>
-</file>
-
-<file path=customXml/item3.xml><?xml version="1.0" encoding="utf-8"?>
 <ct:contentTypeSchema xmlns:ct="http://schemas.microsoft.com/office/2006/metadata/contentType" xmlns:ma="http://schemas.microsoft.com/office/2006/metadata/properties/metaAttributes" ct:_="" ma:_="" ma:contentTypeName="TemplateFile" ma:contentTypeID="0x0101006EDDDB5EE6D98C44930B742096920B300400F5B6D36B3EF94B4E9A635CDF2A18F5B8" ma:contentTypeVersion="72" ma:contentTypeDescription="Create a new document." ma:contentTypeScope="" ma:versionID="a23e56308344d904b51738559c3d67c9">
   <xsd:schema xmlns:xsd="http://www.w3.org/2001/XMLSchema" xmlns:xs="http://www.w3.org/2001/XMLSchema" xmlns:p="http://schemas.microsoft.com/office/2006/metadata/properties" xmlns:ns2="4873beb7-5857-4685-be1f-d57550cc96cc" targetNamespace="http://schemas.microsoft.com/office/2006/metadata/properties" ma:root="true" ma:fieldsID="cd0908cc4600e77bf5da051303e00c8d" ns2:_="">
     <xsd:import namespace="4873beb7-5857-4685-be1f-d57550cc96cc"/>
@@ -8936,6 +9306,15 @@
 </ct:contentTypeSchema>
 </file>
 
+<file path=customXml/item3.xml><?xml version="1.0" encoding="utf-8"?>
+<?mso-contentType ?>
+<FormTemplates xmlns="http://schemas.microsoft.com/sharepoint/v3/contenttype/forms">
+  <Display>DocumentLibraryForm</Display>
+  <Edit>AssetEditForm</Edit>
+  <New>DocumentLibraryForm</New>
+</FormTemplates>
+</file>
+
 <file path=customXml/itemProps1.xml><?xml version="1.0" encoding="utf-8"?>
 <ds:datastoreItem xmlns:ds="http://schemas.openxmlformats.org/officeDocument/2006/customXml" ds:itemID="{60C67BEE-D13F-4BD2-98A5-34D8A0977F68}">
   <ds:schemaRefs>
@@ -8953,14 +9332,6 @@
 </file>
 
 <file path=customXml/itemProps2.xml><?xml version="1.0" encoding="utf-8"?>
-<ds:datastoreItem xmlns:ds="http://schemas.openxmlformats.org/officeDocument/2006/customXml" ds:itemID="{3836F65B-1B07-41EE-A0E8-BC6EF3855225}">
-  <ds:schemaRefs>
-    <ds:schemaRef ds:uri="http://schemas.microsoft.com/sharepoint/v3/contenttype/forms"/>
-  </ds:schemaRefs>
-</ds:datastoreItem>
-</file>
-
-<file path=customXml/itemProps3.xml><?xml version="1.0" encoding="utf-8"?>
 <ds:datastoreItem xmlns:ds="http://schemas.openxmlformats.org/officeDocument/2006/customXml" ds:itemID="{A09BF4D4-EF60-4196-BFC3-9462D607978C}">
   <ds:schemaRefs>
     <ds:schemaRef ds:uri="http://schemas.microsoft.com/office/2006/metadata/contentType"/>
@@ -8976,4 +9347,12 @@
     <ds:schemaRef ds:uri="http://schemas.microsoft.com/internal/obd"/>
   </ds:schemaRefs>
 </ds:datastoreItem>
+</file>
+
+<file path=customXml/itemProps3.xml><?xml version="1.0" encoding="utf-8"?>
+<ds:datastoreItem xmlns:ds="http://schemas.openxmlformats.org/officeDocument/2006/customXml" ds:itemID="{3836F65B-1B07-41EE-A0E8-BC6EF3855225}">
+  <ds:schemaRefs>
+    <ds:schemaRef ds:uri="http://schemas.microsoft.com/sharepoint/v3/contenttype/forms"/>
+  </ds:schemaRefs>
+</ds:datastoreItem>
 </file>